--- a/submission/Thapar_Order66_Submission.pptx
+++ b/submission/Thapar_Order66_Submission.pptx
@@ -12049,7 +12049,7 @@
         <p:spPr>
           <a:xfrm>
             <a:off x="978408" y="2286000"/>
-            <a:ext cx="2354580" cy="365760"/>
+            <a:ext cx="2354580" cy="230832"/>
           </a:xfrm>
           <a:prstGeom prst="rect">
             <a:avLst/>
@@ -12068,14 +12068,20 @@
               </a:spcAft>
             </a:pPr>
             <a:r>
-              <a:rPr sz="1500" b="1" i="0">
+              <a:rPr lang="en-IN" sz="1500" b="1" i="0" dirty="0">
                 <a:solidFill>
                   <a:srgbClr val="14142B"/>
                 </a:solidFill>
                 <a:latin typeface="Calibri"/>
               </a:rPr>
-              <a:t>Grow the ground truth</a:t>
-            </a:r>
+              <a:t>Scale to 10K+ scenarios</a:t>
+            </a:r>
+            <a:endParaRPr sz="1500" b="1" i="0" dirty="0">
+              <a:solidFill>
+                <a:srgbClr val="14142B"/>
+              </a:solidFill>
+              <a:latin typeface="Calibri"/>
+            </a:endParaRPr>
           </a:p>
         </p:txBody>
       </p:sp>
@@ -12088,7 +12094,7 @@
         <p:spPr>
           <a:xfrm>
             <a:off x="978408" y="2697480"/>
-            <a:ext cx="2354580" cy="1463040"/>
+            <a:ext cx="2354580" cy="553998"/>
           </a:xfrm>
           <a:prstGeom prst="rect">
             <a:avLst/>
@@ -12107,14 +12113,20 @@
               </a:spcAft>
             </a:pPr>
             <a:r>
-              <a:rPr sz="1200" b="0" i="0">
+              <a:rPr lang="en-IN" sz="1200" b="0" i="0" dirty="0">
                 <a:solidFill>
                   <a:srgbClr val="63637E"/>
                 </a:solidFill>
                 <a:latin typeface="Calibri"/>
               </a:rPr>
-              <a:t>Expand the 99 labelled deeplink probes with Samsung-verified answers and re-tune thresholds, safety first.</a:t>
-            </a:r>
+              <a:t>Precomputed indexes, monitoring and load validation across retrieval, cache and API layers.</a:t>
+            </a:r>
+            <a:endParaRPr sz="1200" b="0" i="0" dirty="0">
+              <a:solidFill>
+                <a:srgbClr val="63637E"/>
+              </a:solidFill>
+              <a:latin typeface="Calibri"/>
+            </a:endParaRPr>
           </a:p>
         </p:txBody>
       </p:sp>
@@ -12215,7 +12227,7 @@
         <p:spPr>
           <a:xfrm>
             <a:off x="3607308" y="2286000"/>
-            <a:ext cx="2354580" cy="365760"/>
+            <a:ext cx="2354580" cy="230832"/>
           </a:xfrm>
           <a:prstGeom prst="rect">
             <a:avLst/>
@@ -12234,14 +12246,20 @@
               </a:spcAft>
             </a:pPr>
             <a:r>
-              <a:rPr sz="1500" b="1" i="0">
+              <a:rPr lang="en-IN" sz="1500" b="1" i="0" dirty="0">
                 <a:solidFill>
                   <a:srgbClr val="14142B"/>
                 </a:solidFill>
                 <a:latin typeface="Calibri"/>
               </a:rPr>
-              <a:t>Semantic grounding</a:t>
-            </a:r>
+              <a:t>Cut P95 Latency</a:t>
+            </a:r>
+            <a:endParaRPr sz="1500" b="1" i="0" dirty="0">
+              <a:solidFill>
+                <a:srgbClr val="14142B"/>
+              </a:solidFill>
+              <a:latin typeface="Calibri"/>
+            </a:endParaRPr>
           </a:p>
         </p:txBody>
       </p:sp>
@@ -12253,8 +12271,8 @@
         </p:nvSpPr>
         <p:spPr>
           <a:xfrm>
-            <a:off x="3607308" y="2697480"/>
-            <a:ext cx="2354580" cy="1463040"/>
+            <a:off x="3607308" y="2730137"/>
+            <a:ext cx="2354580" cy="553998"/>
           </a:xfrm>
           <a:prstGeom prst="rect">
             <a:avLst/>
@@ -12273,14 +12291,20 @@
               </a:spcAft>
             </a:pPr>
             <a:r>
-              <a:rPr sz="1200" b="0" i="0">
+              <a:rPr lang="en-IN" sz="1200" b="0" i="0" dirty="0">
                 <a:solidFill>
                   <a:srgbClr val="63637E"/>
                 </a:solidFill>
                 <a:latin typeface="Calibri"/>
               </a:rPr>
-              <a:t>Check step support by meaning, not just shared words, to catch invented steps the lexical check misses.</a:t>
-            </a:r>
+              <a:t>Profile and parallelize the slowest steps, drop unnecessary LLM calls, route across providers and models.</a:t>
+            </a:r>
+            <a:endParaRPr sz="1200" b="0" i="0" dirty="0">
+              <a:solidFill>
+                <a:srgbClr val="63637E"/>
+              </a:solidFill>
+              <a:latin typeface="Calibri"/>
+            </a:endParaRPr>
           </a:p>
         </p:txBody>
       </p:sp>
@@ -12381,7 +12405,7 @@
         <p:spPr>
           <a:xfrm>
             <a:off x="6236208" y="2286000"/>
-            <a:ext cx="2354580" cy="365760"/>
+            <a:ext cx="2354580" cy="230832"/>
           </a:xfrm>
           <a:prstGeom prst="rect">
             <a:avLst/>
@@ -12400,14 +12424,20 @@
               </a:spcAft>
             </a:pPr>
             <a:r>
-              <a:rPr sz="1500" b="1" i="0">
+              <a:rPr lang="en-IN" sz="1500" b="1" i="0" dirty="0">
                 <a:solidFill>
                   <a:srgbClr val="14142B"/>
                 </a:solidFill>
                 <a:latin typeface="Calibri"/>
               </a:rPr>
-              <a:t>Localized answers</a:t>
-            </a:r>
+              <a:t>Semantic Grounding</a:t>
+            </a:r>
+            <a:endParaRPr sz="1500" b="1" i="0" dirty="0">
+              <a:solidFill>
+                <a:srgbClr val="14142B"/>
+              </a:solidFill>
+              <a:latin typeface="Calibri"/>
+            </a:endParaRPr>
           </a:p>
         </p:txBody>
       </p:sp>
@@ -12420,7 +12450,7 @@
         <p:spPr>
           <a:xfrm>
             <a:off x="6236208" y="2697480"/>
-            <a:ext cx="2354580" cy="1463040"/>
+            <a:ext cx="2354580" cy="369332"/>
           </a:xfrm>
           <a:prstGeom prst="rect">
             <a:avLst/>
@@ -12439,14 +12469,20 @@
               </a:spcAft>
             </a:pPr>
             <a:r>
-              <a:rPr sz="1200" b="0" i="0">
+              <a:rPr lang="en-IN" sz="1200" b="0" i="0" dirty="0">
                 <a:solidFill>
                   <a:srgbClr val="63637E"/>
                 </a:solidFill>
                 <a:latin typeface="Calibri"/>
               </a:rPr>
-              <a:t>Return the plan in the customer's own language, not just understand it.</a:t>
-            </a:r>
+              <a:t>Check steps by meaning, not shared words, to catch invented steps.</a:t>
+            </a:r>
+            <a:endParaRPr sz="1200" b="0" i="0" dirty="0">
+              <a:solidFill>
+                <a:srgbClr val="63637E"/>
+              </a:solidFill>
+              <a:latin typeface="Calibri"/>
+            </a:endParaRPr>
           </a:p>
         </p:txBody>
       </p:sp>
@@ -12570,13 +12606,31 @@
               </a:spcAft>
             </a:pPr>
             <a:r>
-              <a:rPr sz="1200" b="0" i="0">
+              <a:rPr sz="1200" b="0" i="0" dirty="0">
                 <a:solidFill>
                   <a:srgbClr val="63637E"/>
                 </a:solidFill>
                 <a:latin typeface="Calibri"/>
               </a:rPr>
-              <a:t>Validation deeplinks confirm a fix worked; feedback demotes cached plans that don't.</a:t>
+              <a:t>Validation </a:t>
+            </a:r>
+            <a:r>
+              <a:rPr sz="1200" b="0" i="0" dirty="0" err="1">
+                <a:solidFill>
+                  <a:srgbClr val="63637E"/>
+                </a:solidFill>
+                <a:latin typeface="Calibri"/>
+              </a:rPr>
+              <a:t>deeplinks</a:t>
+            </a:r>
+            <a:r>
+              <a:rPr sz="1200" b="0" i="0" dirty="0">
+                <a:solidFill>
+                  <a:srgbClr val="63637E"/>
+                </a:solidFill>
+                <a:latin typeface="Calibri"/>
+              </a:rPr>
+              <a:t> confirm a fix worked; feedback demotes cached plans that don't.</a:t>
             </a:r>
           </a:p>
         </p:txBody>
